--- a/Theory Class-Notes/Machine learning and Data analytics using Python Syllabus.pptx
+++ b/Theory Class-Notes/Machine learning and Data analytics using Python Syllabus.pptx
@@ -125,6 +125,35 @@
 </p:presentation>
 </file>
 
+<file path=ppt/changesInfos/changesInfo1.xml><?xml version="1.0" encoding="utf-8"?>
+<pc:chgInfo xmlns:a="http://schemas.openxmlformats.org/drawingml/2006/main" xmlns:r="http://schemas.openxmlformats.org/officeDocument/2006/relationships" xmlns:ac="http://schemas.microsoft.com/office/drawing/2013/main/command" xmlns:pc="http://schemas.microsoft.com/office/powerpoint/2013/main/command">
+  <pc:docChgLst>
+    <pc:chgData name="Pramod Naik" userId="ceb6df04-ef15-4d9b-a141-998a03559d75" providerId="ADAL" clId="{A3D4129C-72EA-45F2-AA77-F6ECFB27FD89}"/>
+    <pc:docChg chg="modSld">
+      <pc:chgData name="Pramod Naik" userId="ceb6df04-ef15-4d9b-a141-998a03559d75" providerId="ADAL" clId="{A3D4129C-72EA-45F2-AA77-F6ECFB27FD89}" dt="2025-07-19T10:57:35.360" v="0" actId="20577"/>
+      <pc:docMkLst>
+        <pc:docMk/>
+      </pc:docMkLst>
+      <pc:sldChg chg="modSp mod">
+        <pc:chgData name="Pramod Naik" userId="ceb6df04-ef15-4d9b-a141-998a03559d75" providerId="ADAL" clId="{A3D4129C-72EA-45F2-AA77-F6ECFB27FD89}" dt="2025-07-19T10:57:35.360" v="0" actId="20577"/>
+        <pc:sldMkLst>
+          <pc:docMk/>
+          <pc:sldMk cId="693359045" sldId="430"/>
+        </pc:sldMkLst>
+        <pc:spChg chg="mod">
+          <ac:chgData name="Pramod Naik" userId="ceb6df04-ef15-4d9b-a141-998a03559d75" providerId="ADAL" clId="{A3D4129C-72EA-45F2-AA77-F6ECFB27FD89}" dt="2025-07-19T10:57:35.360" v="0" actId="20577"/>
+          <ac:spMkLst>
+            <pc:docMk/>
+            <pc:sldMk cId="693359045" sldId="430"/>
+            <ac:spMk id="3" creationId="{4F086CB9-AB03-31C2-A35E-EFD91E1BB16B}"/>
+          </ac:spMkLst>
+        </pc:spChg>
+      </pc:sldChg>
+    </pc:docChg>
+  </pc:docChgLst>
+</pc:chgInfo>
+</file>
+
 <file path=ppt/notesMasters/notesMaster1.xml><?xml version="1.0" encoding="utf-8"?>
 <p:notesMaster xmlns:a="http://schemas.openxmlformats.org/drawingml/2006/main" xmlns:r="http://schemas.openxmlformats.org/officeDocument/2006/relationships" xmlns:p="http://schemas.openxmlformats.org/presentationml/2006/main">
   <p:cSld>
@@ -207,7 +236,7 @@
           <a:p>
             <a:fld id="{61532AF1-4615-4667-912A-829B12F8C4D2}" type="datetimeFigureOut">
               <a:rPr lang="en-IN" smtClean="0"/>
-              <a:t>30-05-2025</a:t>
+              <a:t>19-07-2025</a:t>
             </a:fld>
             <a:endParaRPr lang="en-IN"/>
           </a:p>
@@ -624,7 +653,7 @@
           <a:p>
             <a:fld id="{C43A76A3-ADC8-4477-8FC1-B9DD55D84908}" type="datetime1">
               <a:rPr lang="en-US" smtClean="0"/>
-              <a:t>5/30/2025</a:t>
+              <a:t>7/19/2025</a:t>
             </a:fld>
             <a:endParaRPr lang="en-US" dirty="0"/>
           </a:p>
@@ -822,7 +851,7 @@
           <a:p>
             <a:fld id="{D6762538-DC4D-4667-96E5-B3278DDF8B12}" type="datetime1">
               <a:rPr lang="en-US" smtClean="0"/>
-              <a:t>5/30/2025</a:t>
+              <a:t>7/19/2025</a:t>
             </a:fld>
             <a:endParaRPr lang="en-US"/>
           </a:p>
@@ -1030,7 +1059,7 @@
           <a:p>
             <a:fld id="{05880548-5C08-4BE3-B63E-F2BB63B0B00C}" type="datetime1">
               <a:rPr lang="en-US" smtClean="0"/>
-              <a:t>5/30/2025</a:t>
+              <a:t>7/19/2025</a:t>
             </a:fld>
             <a:endParaRPr lang="en-US"/>
           </a:p>
@@ -1228,7 +1257,7 @@
           <a:p>
             <a:fld id="{DE7F49BE-398D-479A-8A7E-5DDBCA61EDCB}" type="datetime1">
               <a:rPr lang="en-US" smtClean="0"/>
-              <a:t>5/30/2025</a:t>
+              <a:t>7/19/2025</a:t>
             </a:fld>
             <a:endParaRPr lang="en-US" dirty="0"/>
           </a:p>
@@ -1504,7 +1533,7 @@
           <a:p>
             <a:fld id="{CCD0C193-4974-4A1F-9C63-07D595E30D66}" type="datetime1">
               <a:rPr lang="en-US" smtClean="0"/>
-              <a:t>5/30/2025</a:t>
+              <a:t>7/19/2025</a:t>
             </a:fld>
             <a:endParaRPr lang="en-US"/>
           </a:p>
@@ -1771,7 +1800,7 @@
           <a:p>
             <a:fld id="{701AA87F-28D4-4BF0-B81F-877A89DFD5AC}" type="datetime1">
               <a:rPr lang="en-US" smtClean="0"/>
-              <a:t>5/30/2025</a:t>
+              <a:t>7/19/2025</a:t>
             </a:fld>
             <a:endParaRPr lang="en-US"/>
           </a:p>
@@ -2185,7 +2214,7 @@
           <a:p>
             <a:fld id="{A8A9F1F3-208B-49A3-B337-9C8ACEB3E0E1}" type="datetime1">
               <a:rPr lang="en-US" smtClean="0"/>
-              <a:t>5/30/2025</a:t>
+              <a:t>7/19/2025</a:t>
             </a:fld>
             <a:endParaRPr lang="en-US"/>
           </a:p>
@@ -2332,7 +2361,7 @@
           <a:p>
             <a:fld id="{27AF6CA6-7293-4AA2-A0E0-A3BF4416E786}" type="datetime1">
               <a:rPr lang="en-US" smtClean="0"/>
-              <a:t>5/30/2025</a:t>
+              <a:t>7/19/2025</a:t>
             </a:fld>
             <a:endParaRPr lang="en-US"/>
           </a:p>
@@ -2445,7 +2474,7 @@
           <a:p>
             <a:fld id="{98D87016-7BCD-46FB-8EE3-AB6C369108B4}" type="datetime1">
               <a:rPr lang="en-US" smtClean="0"/>
-              <a:t>5/30/2025</a:t>
+              <a:t>7/19/2025</a:t>
             </a:fld>
             <a:endParaRPr lang="en-US"/>
           </a:p>
@@ -2764,7 +2793,7 @@
           <a:p>
             <a:fld id="{A1547011-1FFC-4EF8-9A2E-53B4AD2ADBD4}" type="datetime1">
               <a:rPr lang="en-US" smtClean="0"/>
-              <a:t>5/30/2025</a:t>
+              <a:t>7/19/2025</a:t>
             </a:fld>
             <a:endParaRPr lang="en-US"/>
           </a:p>
@@ -3059,7 +3088,7 @@
           <a:p>
             <a:fld id="{9562EB47-45B4-4EF5-A743-B4885DD2F060}" type="datetime1">
               <a:rPr lang="en-US" smtClean="0"/>
-              <a:t>5/30/2025</a:t>
+              <a:t>7/19/2025</a:t>
             </a:fld>
             <a:endParaRPr lang="en-US"/>
           </a:p>
@@ -4444,7 +4473,7 @@
           <a:p>
             <a:fld id="{4A8D24A4-5FEC-4062-8995-EB21925B3B40}" type="datetime1">
               <a:rPr lang="en-US" smtClean="0"/>
-              <a:t>5/30/2025</a:t>
+              <a:t>7/19/2025</a:t>
             </a:fld>
             <a:endParaRPr lang="en-US" sz="1000" dirty="0"/>
           </a:p>
@@ -6841,7 +6870,7 @@
             </a:r>
             <a:r>
               <a:rPr lang="en-US" sz="3200" dirty="0"/>
-              <a:t>Deployment of machine learning models, Building web applications with Flask and Django, Case studies on real-world applications of machine    learning. </a:t>
+              <a:t>Deployment of machine learning models, Building web applications with Flask and Django, Case studies on real-world applications of machine    learning.</a:t>
             </a:r>
             <a:endParaRPr lang="en-IN" sz="3200" dirty="0"/>
           </a:p>
